--- a/dist/초1/도덕·윤리/책임과돌봄/초1_도덕·윤리_책임과돌봄_01_맡은일과배려.pptx
+++ b/dist/초1/도덕·윤리/책임과돌봄/초1_도덕·윤리_책임과돌봄_01_맡은일과배려.pptx
@@ -121,20 +121,20 @@
   <p:extLst>
     <p:ext uri="{521415D9-36F7-43E2-AB2F-B90AF26B5E84}">
       <p14:sectionLst xmlns:p14="http://schemas.microsoft.com/office/powerpoint/2010/main">
-        <p14:section name="도입" id="{222bdc69-7c14-9217-50a2-30c8f52e978c}">
+        <p14:section name="도입" id="{f7866429-3e4e-a5a7-ab6f-a51d5452c390}">
           <p14:sldIdLst>
             <p14:sldId id="256"/>
             <p14:sldId id="257"/>
           </p14:sldIdLst>
         </p14:section>
-        <p14:section name="개념" id="{9a7058dc-d478-a72e-367a-a588106c5761}">
+        <p14:section name="개념" id="{56063596-e19c-71a6-d198-db5d7273b793}">
           <p14:sldIdLst>
             <p14:sldId id="258"/>
             <p14:sldId id="259"/>
             <p14:sldId id="261"/>
           </p14:sldIdLst>
         </p14:section>
-        <p14:section name="연습" id="{ba308665-bb55-5d44-4523-37f80aacbe70}">
+        <p14:section name="연습" id="{ec2e1c27-6f55-708c-609c-0bd3b2c5cc35}">
           <p14:sldIdLst>
             <p14:sldId id="260"/>
             <p14:sldId id="262"/>
@@ -142,13 +142,13 @@
             <p14:sldId id="264"/>
           </p14:sldIdLst>
         </p14:section>
-        <p14:section name="개념" id="{19f96da5-815a-e917-cd43-cec1a2209c7d}">
+        <p14:section name="개념" id="{6cd27e7e-4ed1-51e1-3d63-67f3c5b23957}">
           <p14:sldIdLst/>
         </p14:section>
-        <p14:section name="연습" id="{59f18f76-7eda-1038-df0a-dee7af02d25f}">
+        <p14:section name="연습" id="{404b6585-2824-765e-b8a4-f284c485c5f4}">
           <p14:sldIdLst/>
         </p14:section>
-        <p14:section name="확인" id="{2b68b4de-1776-7670-31e2-02def4562b88}">
+        <p14:section name="확인" id="{0cfb4e16-979a-6400-23eb-6169da766066}">
           <p14:sldIdLst>
             <p14:sldId id="265"/>
             <p14:sldId id="266"/>
@@ -156,12 +156,12 @@
             <p14:sldId id="268"/>
           </p14:sldIdLst>
         </p14:section>
-        <p14:section name="정리" id="{07c6a9a5-d0fa-743f-c712-0dd1d91bf529}">
+        <p14:section name="정리" id="{9ba69662-0489-8136-cf53-bfd3f25ec870}">
           <p14:sldIdLst>
             <p14:sldId id="269"/>
           </p14:sldIdLst>
         </p14:section>
-        <p14:section name="보충" id="{9705314c-f377-7aa8-ffd4-fcec27837f39}">
+        <p14:section name="보충" id="{7eb1d46f-05e8-4c01-e841-3b86fe5290e5}">
           <p14:sldIdLst>
             <p14:sldId id="270"/>
           </p14:sldIdLst>

--- a/dist/초1/도덕·윤리/책임과돌봄/초1_도덕·윤리_책임과돌봄_01_맡은일과배려.pptx
+++ b/dist/초1/도덕·윤리/책임과돌봄/초1_도덕·윤리_책임과돌봄_01_맡은일과배려.pptx
@@ -121,20 +121,20 @@
   <p:extLst>
     <p:ext uri="{521415D9-36F7-43E2-AB2F-B90AF26B5E84}">
       <p14:sectionLst xmlns:p14="http://schemas.microsoft.com/office/powerpoint/2010/main">
-        <p14:section name="도입" id="{f7866429-3e4e-a5a7-ab6f-a51d5452c390}">
+        <p14:section name="도입" id="{634a2067-6f4b-9cf0-80ae-1cadaec9f58c}">
           <p14:sldIdLst>
             <p14:sldId id="256"/>
             <p14:sldId id="257"/>
           </p14:sldIdLst>
         </p14:section>
-        <p14:section name="개념" id="{56063596-e19c-71a6-d198-db5d7273b793}">
+        <p14:section name="개념" id="{3983943d-184a-73da-a9ef-1ab3d1f3f533}">
           <p14:sldIdLst>
             <p14:sldId id="258"/>
             <p14:sldId id="259"/>
             <p14:sldId id="261"/>
           </p14:sldIdLst>
         </p14:section>
-        <p14:section name="연습" id="{ec2e1c27-6f55-708c-609c-0bd3b2c5cc35}">
+        <p14:section name="연습" id="{f3a2ded1-3da0-17c5-2c75-7525b26dd355}">
           <p14:sldIdLst>
             <p14:sldId id="260"/>
             <p14:sldId id="262"/>
@@ -142,13 +142,13 @@
             <p14:sldId id="264"/>
           </p14:sldIdLst>
         </p14:section>
-        <p14:section name="개념" id="{6cd27e7e-4ed1-51e1-3d63-67f3c5b23957}">
+        <p14:section name="개념" id="{acf65adb-67a9-73fd-dc8b-807783307583}">
           <p14:sldIdLst/>
         </p14:section>
-        <p14:section name="연습" id="{404b6585-2824-765e-b8a4-f284c485c5f4}">
+        <p14:section name="연습" id="{0c59b5d8-aa3b-ca3b-4dcd-216c3f25c100}">
           <p14:sldIdLst/>
         </p14:section>
-        <p14:section name="확인" id="{0cfb4e16-979a-6400-23eb-6169da766066}">
+        <p14:section name="확인" id="{1f322de9-079e-95d8-a186-d28b2673a5e4}">
           <p14:sldIdLst>
             <p14:sldId id="265"/>
             <p14:sldId id="266"/>
@@ -156,12 +156,12 @@
             <p14:sldId id="268"/>
           </p14:sldIdLst>
         </p14:section>
-        <p14:section name="정리" id="{9ba69662-0489-8136-cf53-bfd3f25ec870}">
+        <p14:section name="정리" id="{9f88072a-a441-f64d-8176-e5af55a4fcaf}">
           <p14:sldIdLst>
             <p14:sldId id="269"/>
           </p14:sldIdLst>
         </p14:section>
-        <p14:section name="보충" id="{7eb1d46f-05e8-4c01-e841-3b86fe5290e5}">
+        <p14:section name="보충" id="{3760e66f-9566-8120-2945-6595a5161123}">
           <p14:sldIdLst>
             <p14:sldId id="270"/>
           </p14:sldIdLst>
@@ -1173,7 +1173,7 @@
 - 예: 화분 꽃 – 물, 햇빛 / 강아지 – 먹이, 물, 쉴 곳 / 개미 – 먹이, 집(흙). 생물과 필요한 것을 한 가지 이상 짝지어 말하면 맞습니다.
 막히면
 - 집의 화분이나 창밖 나무를 직접 보며 “이 나무는 무엇이 있어야 자랄까?”라고 묻습니다.
-- 이 차시는 계획상 앞 차시가 없습니다. 살아 있는 것과 아닌 것의 구별을 계속 어려워하면 과학 ‘한 가지 기준으로 나누기’에서 생물과 물건을 나누어 보는 활동을 함께 합니다.
+- 살아 있는 것과 아닌 것의 구별을 계속 어려워하면 과학 ‘한 가지 기준으로 나누기’에서 생물과 물건을 나누어 보는 활동을 함께 합니다.
 주의
 - 보충이 오래 걸리면 오늘은 여기까지 하고 다음 날 S02부터 다시 시작합니다.</a:t>
             </a:r>
@@ -1264,7 +1264,7 @@
             <a:r>
               <a:rPr lang="en-US" dirty="0"/>
               <a:t>[S02 · 선수 확인(살아 있는 것 찾기)]
-목적: 살아 있는 것(생물)과 살아 있지 않은 것을 구별하는지 확인합니다. 생물을 배려하려면 생물도 자라고, 먹고, 아플 수 있다는 것을 알아야 하기 때문입니다. 이 차시는 계획상 앞 차시가 없으므로 유치원과 생활에서 익힌 것을 확인합니다.
+목적: 살아 있는 것(생물)과 살아 있지 않은 것을 구별하는지 확인합니다. 생물을 배려하려면 생물도 자라고, 먹고, 아플 수 있다는 것을 알아야 하기 때문입니다. 앞 차시 ‘나는 소중해요’와 생활에서 익힌 것을 확인합니다.
 시간: 약 2분
 이렇게 말해 보세요
 - “이 가운데 살아 있는 것은 무엇일까? 모두 골라 볼래?”
